--- a/2 Tokosavorum.pptx
+++ b/2 Tokosavorum.pptx
@@ -6,19 +6,20 @@
   </p:sldMasterIdLst>
   <p:sldIdLst>
     <p:sldId id="256" r:id="rId2"/>
-    <p:sldId id="269" r:id="rId3"/>
-    <p:sldId id="264" r:id="rId4"/>
+    <p:sldId id="264" r:id="rId3"/>
+    <p:sldId id="269" r:id="rId4"/>
     <p:sldId id="261" r:id="rId5"/>
     <p:sldId id="257" r:id="rId6"/>
     <p:sldId id="258" r:id="rId7"/>
     <p:sldId id="259" r:id="rId8"/>
     <p:sldId id="260" r:id="rId9"/>
     <p:sldId id="262" r:id="rId10"/>
-    <p:sldId id="265" r:id="rId11"/>
-    <p:sldId id="266" r:id="rId12"/>
-    <p:sldId id="267" r:id="rId13"/>
-    <p:sldId id="268" r:id="rId14"/>
-    <p:sldId id="263" r:id="rId15"/>
+    <p:sldId id="266" r:id="rId11"/>
+    <p:sldId id="267" r:id="rId12"/>
+    <p:sldId id="270" r:id="rId13"/>
+    <p:sldId id="265" r:id="rId14"/>
+    <p:sldId id="268" r:id="rId15"/>
+    <p:sldId id="263" r:id="rId16"/>
   </p:sldIdLst>
   <p:sldSz cx="12192000" cy="6858000"/>
   <p:notesSz cx="6858000" cy="9144000"/>
@@ -256,7 +257,7 @@
           <a:p>
             <a:fld id="{26B45A88-84CD-47B4-B068-1CCEBD78BFD4}" type="datetimeFigureOut">
               <a:rPr lang="ru-RU" smtClean="0"/>
-              <a:t>03.03.2026</a:t>
+              <a:t>04.03.2026</a:t>
             </a:fld>
             <a:endParaRPr lang="ru-RU"/>
           </a:p>
@@ -426,7 +427,7 @@
           <a:p>
             <a:fld id="{26B45A88-84CD-47B4-B068-1CCEBD78BFD4}" type="datetimeFigureOut">
               <a:rPr lang="ru-RU" smtClean="0"/>
-              <a:t>03.03.2026</a:t>
+              <a:t>04.03.2026</a:t>
             </a:fld>
             <a:endParaRPr lang="ru-RU"/>
           </a:p>
@@ -606,7 +607,7 @@
           <a:p>
             <a:fld id="{26B45A88-84CD-47B4-B068-1CCEBD78BFD4}" type="datetimeFigureOut">
               <a:rPr lang="ru-RU" smtClean="0"/>
-              <a:t>03.03.2026</a:t>
+              <a:t>04.03.2026</a:t>
             </a:fld>
             <a:endParaRPr lang="ru-RU"/>
           </a:p>
@@ -776,7 +777,7 @@
           <a:p>
             <a:fld id="{26B45A88-84CD-47B4-B068-1CCEBD78BFD4}" type="datetimeFigureOut">
               <a:rPr lang="ru-RU" smtClean="0"/>
-              <a:t>03.03.2026</a:t>
+              <a:t>04.03.2026</a:t>
             </a:fld>
             <a:endParaRPr lang="ru-RU"/>
           </a:p>
@@ -1022,7 +1023,7 @@
           <a:p>
             <a:fld id="{26B45A88-84CD-47B4-B068-1CCEBD78BFD4}" type="datetimeFigureOut">
               <a:rPr lang="ru-RU" smtClean="0"/>
-              <a:t>03.03.2026</a:t>
+              <a:t>04.03.2026</a:t>
             </a:fld>
             <a:endParaRPr lang="ru-RU"/>
           </a:p>
@@ -1254,7 +1255,7 @@
           <a:p>
             <a:fld id="{26B45A88-84CD-47B4-B068-1CCEBD78BFD4}" type="datetimeFigureOut">
               <a:rPr lang="ru-RU" smtClean="0"/>
-              <a:t>03.03.2026</a:t>
+              <a:t>04.03.2026</a:t>
             </a:fld>
             <a:endParaRPr lang="ru-RU"/>
           </a:p>
@@ -1621,7 +1622,7 @@
           <a:p>
             <a:fld id="{26B45A88-84CD-47B4-B068-1CCEBD78BFD4}" type="datetimeFigureOut">
               <a:rPr lang="ru-RU" smtClean="0"/>
-              <a:t>03.03.2026</a:t>
+              <a:t>04.03.2026</a:t>
             </a:fld>
             <a:endParaRPr lang="ru-RU"/>
           </a:p>
@@ -1739,7 +1740,7 @@
           <a:p>
             <a:fld id="{26B45A88-84CD-47B4-B068-1CCEBD78BFD4}" type="datetimeFigureOut">
               <a:rPr lang="ru-RU" smtClean="0"/>
-              <a:t>03.03.2026</a:t>
+              <a:t>04.03.2026</a:t>
             </a:fld>
             <a:endParaRPr lang="ru-RU"/>
           </a:p>
@@ -1834,7 +1835,7 @@
           <a:p>
             <a:fld id="{26B45A88-84CD-47B4-B068-1CCEBD78BFD4}" type="datetimeFigureOut">
               <a:rPr lang="ru-RU" smtClean="0"/>
-              <a:t>03.03.2026</a:t>
+              <a:t>04.03.2026</a:t>
             </a:fld>
             <a:endParaRPr lang="ru-RU"/>
           </a:p>
@@ -2111,7 +2112,7 @@
           <a:p>
             <a:fld id="{26B45A88-84CD-47B4-B068-1CCEBD78BFD4}" type="datetimeFigureOut">
               <a:rPr lang="ru-RU" smtClean="0"/>
-              <a:t>03.03.2026</a:t>
+              <a:t>04.03.2026</a:t>
             </a:fld>
             <a:endParaRPr lang="ru-RU"/>
           </a:p>
@@ -2364,7 +2365,7 @@
           <a:p>
             <a:fld id="{26B45A88-84CD-47B4-B068-1CCEBD78BFD4}" type="datetimeFigureOut">
               <a:rPr lang="ru-RU" smtClean="0"/>
-              <a:t>03.03.2026</a:t>
+              <a:t>04.03.2026</a:t>
             </a:fld>
             <a:endParaRPr lang="ru-RU"/>
           </a:p>
@@ -2577,7 +2578,7 @@
           <a:p>
             <a:fld id="{26B45A88-84CD-47B4-B068-1CCEBD78BFD4}" type="datetimeFigureOut">
               <a:rPr lang="ru-RU" smtClean="0"/>
-              <a:t>03.03.2026</a:t>
+              <a:t>04.03.2026</a:t>
             </a:fld>
             <a:endParaRPr lang="ru-RU"/>
           </a:p>
@@ -3151,6 +3152,884 @@
         </p:nvSpPr>
         <p:spPr>
           <a:xfrm>
+            <a:off x="776055" y="461639"/>
+            <a:ext cx="10515600" cy="846169"/>
+          </a:xfrm>
+        </p:spPr>
+        <p:txBody>
+          <a:bodyPr/>
+          <a:lstStyle/>
+          <a:p>
+            <a:pPr algn="ctr"/>
+            <a:r>
+              <a:rPr lang="en-US" dirty="0" smtClean="0"/>
+              <a:t>PD (</a:t>
+            </a:r>
+            <a:r>
+              <a:rPr lang="en-US" dirty="0"/>
+              <a:t>Probability of </a:t>
+            </a:r>
+            <a:r>
+              <a:rPr lang="en-US" dirty="0" smtClean="0"/>
+              <a:t>Default)-</a:t>
+            </a:r>
+            <a:r>
+              <a:rPr lang="hy-AM" dirty="0" smtClean="0"/>
+              <a:t>ի Բանաձևը</a:t>
+            </a:r>
+            <a:endParaRPr lang="ru-RU" dirty="0"/>
+          </a:p>
+        </p:txBody>
+      </p:sp>
+      <mc:AlternateContent xmlns:mc="http://schemas.openxmlformats.org/markup-compatibility/2006">
+        <mc:Choice xmlns:a14="http://schemas.microsoft.com/office/drawing/2010/main" Requires="a14">
+          <p:sp>
+            <p:nvSpPr>
+              <p:cNvPr id="3" name="Content Placeholder 2"/>
+              <p:cNvSpPr>
+                <a:spLocks noGrp="1"/>
+              </p:cNvSpPr>
+              <p:nvPr>
+                <p:ph idx="1"/>
+              </p:nvPr>
+            </p:nvSpPr>
+            <p:spPr>
+              <a:xfrm>
+                <a:off x="1959005" y="1161130"/>
+                <a:ext cx="8149701" cy="970799"/>
+              </a:xfrm>
+            </p:spPr>
+            <p:txBody>
+              <a:bodyPr>
+                <a:normAutofit/>
+              </a:bodyPr>
+              <a:lstStyle/>
+              <a:p>
+                <a:pPr marL="0" indent="0" algn="ctr">
+                  <a:buNone/>
+                </a:pPr>
+                <a:endParaRPr lang="ru-RU" dirty="0"/>
+              </a:p>
+              <a:p>
+                <a:pPr marL="0" indent="0" algn="ctr">
+                  <a:buNone/>
+                </a:pPr>
+                <a14:m>
+                  <m:oMathPara xmlns:m="http://schemas.openxmlformats.org/officeDocument/2006/math">
+                    <m:oMathParaPr>
+                      <m:jc m:val="centerGroup"/>
+                    </m:oMathParaPr>
+                    <m:oMath xmlns:m="http://schemas.openxmlformats.org/officeDocument/2006/math">
+                      <m:r>
+                        <a:rPr lang="hy-AM" i="1">
+                          <a:latin typeface="Cambria Math" panose="02040503050406030204" pitchFamily="18" charset="0"/>
+                        </a:rPr>
+                        <m:t>𝑃</m:t>
+                      </m:r>
+                      <m:d>
+                        <m:dPr>
+                          <m:ctrlPr>
+                            <a:rPr lang="ru-RU" i="1">
+                              <a:latin typeface="Cambria Math" panose="02040503050406030204" pitchFamily="18" charset="0"/>
+                            </a:rPr>
+                          </m:ctrlPr>
+                        </m:dPr>
+                        <m:e>
+                          <m:r>
+                            <a:rPr lang="hy-AM" i="1">
+                              <a:latin typeface="Cambria Math" panose="02040503050406030204" pitchFamily="18" charset="0"/>
+                            </a:rPr>
+                            <m:t>𝑦</m:t>
+                          </m:r>
+                          <m:r>
+                            <a:rPr lang="hy-AM" i="1">
+                              <a:latin typeface="Cambria Math" panose="02040503050406030204" pitchFamily="18" charset="0"/>
+                            </a:rPr>
+                            <m:t>=1</m:t>
+                          </m:r>
+                        </m:e>
+                        <m:e>
+                          <m:r>
+                            <a:rPr lang="hy-AM" i="1">
+                              <a:latin typeface="Cambria Math" panose="02040503050406030204" pitchFamily="18" charset="0"/>
+                            </a:rPr>
+                            <m:t>𝑋</m:t>
+                          </m:r>
+                        </m:e>
+                      </m:d>
+                      <m:r>
+                        <a:rPr lang="hy-AM" i="1">
+                          <a:latin typeface="Cambria Math" panose="02040503050406030204" pitchFamily="18" charset="0"/>
+                        </a:rPr>
+                        <m:t>=</m:t>
+                      </m:r>
+                      <m:r>
+                        <a:rPr lang="hy-AM" i="1">
+                          <a:latin typeface="Cambria Math" panose="02040503050406030204" pitchFamily="18" charset="0"/>
+                        </a:rPr>
+                        <m:t>𝜎</m:t>
+                      </m:r>
+                      <m:d>
+                        <m:dPr>
+                          <m:ctrlPr>
+                            <a:rPr lang="ru-RU" i="1">
+                              <a:latin typeface="Cambria Math" panose="02040503050406030204" pitchFamily="18" charset="0"/>
+                            </a:rPr>
+                          </m:ctrlPr>
+                        </m:dPr>
+                        <m:e>
+                          <m:sSub>
+                            <m:sSubPr>
+                              <m:ctrlPr>
+                                <a:rPr lang="ru-RU" i="1">
+                                  <a:latin typeface="Cambria Math" panose="02040503050406030204" pitchFamily="18" charset="0"/>
+                                </a:rPr>
+                              </m:ctrlPr>
+                            </m:sSubPr>
+                            <m:e>
+                              <m:r>
+                                <a:rPr lang="hy-AM" i="1">
+                                  <a:latin typeface="Cambria Math" panose="02040503050406030204" pitchFamily="18" charset="0"/>
+                                </a:rPr>
+                                <m:t>𝛽</m:t>
+                              </m:r>
+                            </m:e>
+                            <m:sub>
+                              <m:r>
+                                <a:rPr lang="hy-AM" i="1">
+                                  <a:latin typeface="Cambria Math" panose="02040503050406030204" pitchFamily="18" charset="0"/>
+                                </a:rPr>
+                                <m:t>0</m:t>
+                              </m:r>
+                            </m:sub>
+                          </m:sSub>
+                          <m:r>
+                            <a:rPr lang="hy-AM" i="1">
+                              <a:latin typeface="Cambria Math" panose="02040503050406030204" pitchFamily="18" charset="0"/>
+                            </a:rPr>
+                            <m:t>+</m:t>
+                          </m:r>
+                          <m:sSub>
+                            <m:sSubPr>
+                              <m:ctrlPr>
+                                <a:rPr lang="ru-RU" i="1">
+                                  <a:latin typeface="Cambria Math" panose="02040503050406030204" pitchFamily="18" charset="0"/>
+                                </a:rPr>
+                              </m:ctrlPr>
+                            </m:sSubPr>
+                            <m:e>
+                              <m:r>
+                                <a:rPr lang="hy-AM" i="1">
+                                  <a:latin typeface="Cambria Math" panose="02040503050406030204" pitchFamily="18" charset="0"/>
+                                </a:rPr>
+                                <m:t>𝛽</m:t>
+                              </m:r>
+                            </m:e>
+                            <m:sub>
+                              <m:r>
+                                <a:rPr lang="hy-AM" i="1">
+                                  <a:latin typeface="Cambria Math" panose="02040503050406030204" pitchFamily="18" charset="0"/>
+                                </a:rPr>
+                                <m:t>1</m:t>
+                              </m:r>
+                            </m:sub>
+                          </m:sSub>
+                          <m:sSub>
+                            <m:sSubPr>
+                              <m:ctrlPr>
+                                <a:rPr lang="ru-RU" i="1">
+                                  <a:latin typeface="Cambria Math" panose="02040503050406030204" pitchFamily="18" charset="0"/>
+                                </a:rPr>
+                              </m:ctrlPr>
+                            </m:sSubPr>
+                            <m:e>
+                              <m:r>
+                                <a:rPr lang="hy-AM" i="1">
+                                  <a:latin typeface="Cambria Math" panose="02040503050406030204" pitchFamily="18" charset="0"/>
+                                </a:rPr>
+                                <m:t>𝑥</m:t>
+                              </m:r>
+                            </m:e>
+                            <m:sub>
+                              <m:r>
+                                <a:rPr lang="hy-AM" i="1">
+                                  <a:latin typeface="Cambria Math" panose="02040503050406030204" pitchFamily="18" charset="0"/>
+                                </a:rPr>
+                                <m:t>1</m:t>
+                              </m:r>
+                            </m:sub>
+                          </m:sSub>
+                          <m:r>
+                            <a:rPr lang="hy-AM" i="1">
+                              <a:latin typeface="Cambria Math" panose="02040503050406030204" pitchFamily="18" charset="0"/>
+                            </a:rPr>
+                            <m:t>+</m:t>
+                          </m:r>
+                          <m:sSub>
+                            <m:sSubPr>
+                              <m:ctrlPr>
+                                <a:rPr lang="ru-RU" i="1">
+                                  <a:latin typeface="Cambria Math" panose="02040503050406030204" pitchFamily="18" charset="0"/>
+                                </a:rPr>
+                              </m:ctrlPr>
+                            </m:sSubPr>
+                            <m:e>
+                              <m:r>
+                                <a:rPr lang="hy-AM" i="1">
+                                  <a:latin typeface="Cambria Math" panose="02040503050406030204" pitchFamily="18" charset="0"/>
+                                </a:rPr>
+                                <m:t>𝛽</m:t>
+                              </m:r>
+                            </m:e>
+                            <m:sub>
+                              <m:r>
+                                <a:rPr lang="hy-AM" i="1">
+                                  <a:latin typeface="Cambria Math" panose="02040503050406030204" pitchFamily="18" charset="0"/>
+                                </a:rPr>
+                                <m:t>2</m:t>
+                              </m:r>
+                            </m:sub>
+                          </m:sSub>
+                          <m:sSub>
+                            <m:sSubPr>
+                              <m:ctrlPr>
+                                <a:rPr lang="ru-RU" i="1">
+                                  <a:latin typeface="Cambria Math" panose="02040503050406030204" pitchFamily="18" charset="0"/>
+                                </a:rPr>
+                              </m:ctrlPr>
+                            </m:sSubPr>
+                            <m:e>
+                              <m:r>
+                                <a:rPr lang="hy-AM" i="1">
+                                  <a:latin typeface="Cambria Math" panose="02040503050406030204" pitchFamily="18" charset="0"/>
+                                </a:rPr>
+                                <m:t>𝑥</m:t>
+                              </m:r>
+                            </m:e>
+                            <m:sub>
+                              <m:r>
+                                <a:rPr lang="hy-AM" i="1">
+                                  <a:latin typeface="Cambria Math" panose="02040503050406030204" pitchFamily="18" charset="0"/>
+                                </a:rPr>
+                                <m:t>2</m:t>
+                              </m:r>
+                            </m:sub>
+                          </m:sSub>
+                          <m:r>
+                            <a:rPr lang="hy-AM" i="1">
+                              <a:latin typeface="Cambria Math" panose="02040503050406030204" pitchFamily="18" charset="0"/>
+                            </a:rPr>
+                            <m:t>+…+</m:t>
+                          </m:r>
+                          <m:sSub>
+                            <m:sSubPr>
+                              <m:ctrlPr>
+                                <a:rPr lang="ru-RU" i="1">
+                                  <a:latin typeface="Cambria Math" panose="02040503050406030204" pitchFamily="18" charset="0"/>
+                                </a:rPr>
+                              </m:ctrlPr>
+                            </m:sSubPr>
+                            <m:e>
+                              <m:r>
+                                <a:rPr lang="hy-AM" i="1">
+                                  <a:latin typeface="Cambria Math" panose="02040503050406030204" pitchFamily="18" charset="0"/>
+                                </a:rPr>
+                                <m:t>𝛽</m:t>
+                              </m:r>
+                            </m:e>
+                            <m:sub>
+                              <m:r>
+                                <a:rPr lang="hy-AM" i="1">
+                                  <a:latin typeface="Cambria Math" panose="02040503050406030204" pitchFamily="18" charset="0"/>
+                                </a:rPr>
+                                <m:t>𝑛</m:t>
+                              </m:r>
+                            </m:sub>
+                          </m:sSub>
+                          <m:sSub>
+                            <m:sSubPr>
+                              <m:ctrlPr>
+                                <a:rPr lang="ru-RU" i="1">
+                                  <a:latin typeface="Cambria Math" panose="02040503050406030204" pitchFamily="18" charset="0"/>
+                                </a:rPr>
+                              </m:ctrlPr>
+                            </m:sSubPr>
+                            <m:e>
+                              <m:r>
+                                <a:rPr lang="hy-AM" i="1">
+                                  <a:latin typeface="Cambria Math" panose="02040503050406030204" pitchFamily="18" charset="0"/>
+                                </a:rPr>
+                                <m:t>𝑥</m:t>
+                              </m:r>
+                            </m:e>
+                            <m:sub>
+                              <m:r>
+                                <a:rPr lang="hy-AM" i="1">
+                                  <a:latin typeface="Cambria Math" panose="02040503050406030204" pitchFamily="18" charset="0"/>
+                                </a:rPr>
+                                <m:t>𝑛</m:t>
+                              </m:r>
+                            </m:sub>
+                          </m:sSub>
+                        </m:e>
+                      </m:d>
+                    </m:oMath>
+                  </m:oMathPara>
+                </a14:m>
+                <a:endParaRPr lang="ru-RU" dirty="0"/>
+              </a:p>
+            </p:txBody>
+          </p:sp>
+        </mc:Choice>
+        <mc:Fallback>
+          <p:sp>
+            <p:nvSpPr>
+              <p:cNvPr id="3" name="Content Placeholder 2"/>
+              <p:cNvSpPr>
+                <a:spLocks noGrp="1" noRot="1" noChangeAspect="1" noMove="1" noResize="1" noEditPoints="1" noAdjustHandles="1" noChangeArrowheads="1" noChangeShapeType="1" noTextEdit="1"/>
+              </p:cNvSpPr>
+              <p:nvPr>
+                <p:ph idx="1"/>
+              </p:nvPr>
+            </p:nvSpPr>
+            <p:spPr>
+              <a:xfrm>
+                <a:off x="1959005" y="1161130"/>
+                <a:ext cx="8149701" cy="970799"/>
+              </a:xfrm>
+              <a:blipFill>
+                <a:blip r:embed="rId2"/>
+                <a:stretch>
+                  <a:fillRect/>
+                </a:stretch>
+              </a:blipFill>
+            </p:spPr>
+            <p:txBody>
+              <a:bodyPr/>
+              <a:lstStyle/>
+              <a:p>
+                <a:r>
+                  <a:rPr lang="ru-RU">
+                    <a:noFill/>
+                  </a:rPr>
+                  <a:t> </a:t>
+                </a:r>
+              </a:p>
+            </p:txBody>
+          </p:sp>
+        </mc:Fallback>
+      </mc:AlternateContent>
+      <p:pic>
+        <p:nvPicPr>
+          <p:cNvPr id="1026" name="Picture 2" descr="Sigmoid Function - GeeksforGeeks"/>
+          <p:cNvPicPr>
+            <a:picLocks noChangeAspect="1" noChangeArrowheads="1"/>
+          </p:cNvPicPr>
+          <p:nvPr/>
+        </p:nvPicPr>
+        <p:blipFill>
+          <a:blip r:embed="rId3">
+            <a:extLst>
+              <a:ext uri="{28A0092B-C50C-407E-A947-70E740481C1C}">
+                <a14:useLocalDpi xmlns:a14="http://schemas.microsoft.com/office/drawing/2010/main" val="0"/>
+              </a:ext>
+            </a:extLst>
+          </a:blip>
+          <a:srcRect/>
+          <a:stretch>
+            <a:fillRect/>
+          </a:stretch>
+        </p:blipFill>
+        <p:spPr bwMode="auto">
+          <a:xfrm>
+            <a:off x="2403946" y="2300606"/>
+            <a:ext cx="6724624" cy="4352154"/>
+          </a:xfrm>
+          <a:prstGeom prst="rect">
+            <a:avLst/>
+          </a:prstGeom>
+          <a:noFill/>
+          <a:extLst>
+            <a:ext uri="{909E8E84-426E-40DD-AFC4-6F175D3DCCD1}">
+              <a14:hiddenFill xmlns:a14="http://schemas.microsoft.com/office/drawing/2010/main">
+                <a:solidFill>
+                  <a:srgbClr val="FFFFFF"/>
+                </a:solidFill>
+              </a14:hiddenFill>
+            </a:ext>
+          </a:extLst>
+        </p:spPr>
+      </p:pic>
+    </p:spTree>
+    <p:extLst>
+      <p:ext uri="{BB962C8B-B14F-4D97-AF65-F5344CB8AC3E}">
+        <p14:creationId xmlns:p14="http://schemas.microsoft.com/office/powerpoint/2010/main" val="3870628688"/>
+      </p:ext>
+    </p:extLst>
+  </p:cSld>
+  <p:clrMapOvr>
+    <a:masterClrMapping/>
+  </p:clrMapOvr>
+</p:sld>
+</file>
+
+<file path=ppt/slides/slide11.xml><?xml version="1.0" encoding="utf-8"?>
+<p:sld xmlns:a="http://schemas.openxmlformats.org/drawingml/2006/main" xmlns:r="http://schemas.openxmlformats.org/officeDocument/2006/relationships" xmlns:p="http://schemas.openxmlformats.org/presentationml/2006/main">
+  <p:cSld>
+    <p:spTree>
+      <p:nvGrpSpPr>
+        <p:cNvPr id="1" name=""/>
+        <p:cNvGrpSpPr/>
+        <p:nvPr/>
+      </p:nvGrpSpPr>
+      <p:grpSpPr>
+        <a:xfrm>
+          <a:off x="0" y="0"/>
+          <a:ext cx="0" cy="0"/>
+          <a:chOff x="0" y="0"/>
+          <a:chExt cx="0" cy="0"/>
+        </a:xfrm>
+      </p:grpSpPr>
+      <p:sp>
+        <p:nvSpPr>
+          <p:cNvPr id="2" name="Title 1"/>
+          <p:cNvSpPr>
+            <a:spLocks noGrp="1"/>
+          </p:cNvSpPr>
+          <p:nvPr>
+            <p:ph type="title"/>
+          </p:nvPr>
+        </p:nvSpPr>
+        <p:spPr>
+          <a:xfrm>
+            <a:off x="838200" y="915541"/>
+            <a:ext cx="10515600" cy="1325563"/>
+          </a:xfrm>
+        </p:spPr>
+        <p:txBody>
+          <a:bodyPr/>
+          <a:lstStyle/>
+          <a:p>
+            <a:pPr algn="ctr"/>
+            <a:r>
+              <a:rPr lang="hy-AM" dirty="0"/>
+              <a:t>EAD </a:t>
+            </a:r>
+            <a:r>
+              <a:rPr lang="hy-AM" dirty="0" smtClean="0"/>
+              <a:t>Գործակցի Բանաձևը</a:t>
+            </a:r>
+            <a:endParaRPr lang="ru-RU" dirty="0"/>
+          </a:p>
+        </p:txBody>
+      </p:sp>
+      <mc:AlternateContent xmlns:mc="http://schemas.openxmlformats.org/markup-compatibility/2006" xmlns:a14="http://schemas.microsoft.com/office/drawing/2010/main">
+        <mc:Choice Requires="a14">
+          <p:sp>
+            <p:nvSpPr>
+              <p:cNvPr id="3" name="Content Placeholder 2"/>
+              <p:cNvSpPr>
+                <a:spLocks noGrp="1"/>
+              </p:cNvSpPr>
+              <p:nvPr>
+                <p:ph idx="1"/>
+              </p:nvPr>
+            </p:nvSpPr>
+            <p:spPr>
+              <a:xfrm>
+                <a:off x="838200" y="3077377"/>
+                <a:ext cx="10515600" cy="757777"/>
+              </a:xfrm>
+            </p:spPr>
+            <p:txBody>
+              <a:bodyPr>
+                <a:normAutofit/>
+              </a:bodyPr>
+              <a:lstStyle/>
+              <a:p>
+                <a:pPr marL="0" indent="0">
+                  <a:buNone/>
+                </a:pPr>
+                <a14:m>
+                  <m:oMathPara xmlns:m="http://schemas.openxmlformats.org/officeDocument/2006/math">
+                    <m:oMathParaPr>
+                      <m:jc m:val="centerGroup"/>
+                    </m:oMathParaPr>
+                    <m:oMath xmlns:m="http://schemas.openxmlformats.org/officeDocument/2006/math">
+                      <m:r>
+                        <a:rPr lang="hy-AM" sz="3200" i="1">
+                          <a:latin typeface="Cambria Math" panose="02040503050406030204" pitchFamily="18" charset="0"/>
+                        </a:rPr>
+                        <m:t>𝐸𝐴𝐷</m:t>
+                      </m:r>
+                      <m:r>
+                        <a:rPr lang="hy-AM" sz="3200" i="1">
+                          <a:latin typeface="Cambria Math" panose="02040503050406030204" pitchFamily="18" charset="0"/>
+                        </a:rPr>
+                        <m:t>=</m:t>
+                      </m:r>
+                      <m:r>
+                        <a:rPr lang="hy-AM" sz="3200" i="1">
+                          <a:latin typeface="Cambria Math" panose="02040503050406030204" pitchFamily="18" charset="0"/>
+                        </a:rPr>
+                        <m:t>𝐷𝑟𝑎𝑤𝑛</m:t>
+                      </m:r>
+                      <m:r>
+                        <a:rPr lang="hy-AM" sz="3200" i="1">
+                          <a:latin typeface="Cambria Math" panose="02040503050406030204" pitchFamily="18" charset="0"/>
+                        </a:rPr>
+                        <m:t> </m:t>
+                      </m:r>
+                      <m:r>
+                        <a:rPr lang="hy-AM" sz="3200" i="1">
+                          <a:latin typeface="Cambria Math" panose="02040503050406030204" pitchFamily="18" charset="0"/>
+                        </a:rPr>
+                        <m:t>𝐴𝑚𝑜𝑢𝑛𝑡</m:t>
+                      </m:r>
+                      <m:r>
+                        <a:rPr lang="hy-AM" sz="3200" i="1">
+                          <a:latin typeface="Cambria Math" panose="02040503050406030204" pitchFamily="18" charset="0"/>
+                        </a:rPr>
+                        <m:t>+(</m:t>
+                      </m:r>
+                      <m:r>
+                        <a:rPr lang="hy-AM" sz="3200" i="1">
+                          <a:latin typeface="Cambria Math" panose="02040503050406030204" pitchFamily="18" charset="0"/>
+                        </a:rPr>
+                        <m:t>𝐶𝐶𝐹</m:t>
+                      </m:r>
+                      <m:r>
+                        <a:rPr lang="hy-AM" sz="3200" i="1">
+                          <a:latin typeface="Cambria Math" panose="02040503050406030204" pitchFamily="18" charset="0"/>
+                        </a:rPr>
+                        <m:t>×</m:t>
+                      </m:r>
+                      <m:r>
+                        <a:rPr lang="hy-AM" sz="3200" i="1">
+                          <a:latin typeface="Cambria Math" panose="02040503050406030204" pitchFamily="18" charset="0"/>
+                        </a:rPr>
+                        <m:t>𝑈𝑛𝑑𝑟𝑎𝑤𝑛</m:t>
+                      </m:r>
+                      <m:r>
+                        <a:rPr lang="hy-AM" sz="3200" i="1">
+                          <a:latin typeface="Cambria Math" panose="02040503050406030204" pitchFamily="18" charset="0"/>
+                        </a:rPr>
+                        <m:t> </m:t>
+                      </m:r>
+                      <m:r>
+                        <a:rPr lang="hy-AM" sz="3200" i="1">
+                          <a:latin typeface="Cambria Math" panose="02040503050406030204" pitchFamily="18" charset="0"/>
+                        </a:rPr>
+                        <m:t>𝐴𝑚𝑜𝑢𝑛𝑡</m:t>
+                      </m:r>
+                      <m:r>
+                        <a:rPr lang="hy-AM" sz="3200" i="1">
+                          <a:latin typeface="Cambria Math" panose="02040503050406030204" pitchFamily="18" charset="0"/>
+                        </a:rPr>
+                        <m:t>)</m:t>
+                      </m:r>
+                    </m:oMath>
+                  </m:oMathPara>
+                </a14:m>
+                <a:endParaRPr lang="ru-RU" sz="3200" dirty="0"/>
+              </a:p>
+            </p:txBody>
+          </p:sp>
+        </mc:Choice>
+        <mc:Fallback xmlns="">
+          <p:sp>
+            <p:nvSpPr>
+              <p:cNvPr id="3" name="Content Placeholder 2"/>
+              <p:cNvSpPr>
+                <a:spLocks noGrp="1" noRot="1" noChangeAspect="1" noMove="1" noResize="1" noEditPoints="1" noAdjustHandles="1" noChangeArrowheads="1" noChangeShapeType="1" noTextEdit="1"/>
+              </p:cNvSpPr>
+              <p:nvPr>
+                <p:ph idx="1"/>
+              </p:nvPr>
+            </p:nvSpPr>
+            <p:spPr>
+              <a:xfrm>
+                <a:off x="838200" y="3077377"/>
+                <a:ext cx="10515600" cy="757777"/>
+              </a:xfrm>
+              <a:blipFill>
+                <a:blip r:embed="rId2"/>
+                <a:stretch>
+                  <a:fillRect/>
+                </a:stretch>
+              </a:blipFill>
+            </p:spPr>
+            <p:txBody>
+              <a:bodyPr/>
+              <a:lstStyle/>
+              <a:p>
+                <a:r>
+                  <a:rPr lang="ru-RU">
+                    <a:noFill/>
+                  </a:rPr>
+                  <a:t> </a:t>
+                </a:r>
+              </a:p>
+            </p:txBody>
+          </p:sp>
+        </mc:Fallback>
+      </mc:AlternateContent>
+    </p:spTree>
+    <p:extLst>
+      <p:ext uri="{BB962C8B-B14F-4D97-AF65-F5344CB8AC3E}">
+        <p14:creationId xmlns:p14="http://schemas.microsoft.com/office/powerpoint/2010/main" val="1495527178"/>
+      </p:ext>
+    </p:extLst>
+  </p:cSld>
+  <p:clrMapOvr>
+    <a:masterClrMapping/>
+  </p:clrMapOvr>
+</p:sld>
+</file>
+
+<file path=ppt/slides/slide12.xml><?xml version="1.0" encoding="utf-8"?>
+<p:sld xmlns:a="http://schemas.openxmlformats.org/drawingml/2006/main" xmlns:r="http://schemas.openxmlformats.org/officeDocument/2006/relationships" xmlns:p="http://schemas.openxmlformats.org/presentationml/2006/main">
+  <p:cSld>
+    <p:spTree>
+      <p:nvGrpSpPr>
+        <p:cNvPr id="1" name=""/>
+        <p:cNvGrpSpPr/>
+        <p:nvPr/>
+      </p:nvGrpSpPr>
+      <p:grpSpPr>
+        <a:xfrm>
+          <a:off x="0" y="0"/>
+          <a:ext cx="0" cy="0"/>
+          <a:chOff x="0" y="0"/>
+          <a:chExt cx="0" cy="0"/>
+        </a:xfrm>
+      </p:grpSpPr>
+      <p:sp>
+        <p:nvSpPr>
+          <p:cNvPr id="4" name="Title 1"/>
+          <p:cNvSpPr>
+            <a:spLocks noGrp="1"/>
+          </p:cNvSpPr>
+          <p:nvPr>
+            <p:ph type="title"/>
+          </p:nvPr>
+        </p:nvSpPr>
+        <p:spPr>
+          <a:xfrm>
+            <a:off x="838200" y="915541"/>
+            <a:ext cx="10515600" cy="1325563"/>
+          </a:xfrm>
+        </p:spPr>
+        <p:txBody>
+          <a:bodyPr/>
+          <a:lstStyle/>
+          <a:p>
+            <a:pPr algn="ctr"/>
+            <a:r>
+              <a:rPr lang="en-US" dirty="0" smtClean="0"/>
+              <a:t>LGD</a:t>
+            </a:r>
+            <a:r>
+              <a:rPr lang="hy-AM" dirty="0" smtClean="0"/>
+              <a:t> </a:t>
+            </a:r>
+            <a:r>
+              <a:rPr lang="hy-AM" dirty="0" smtClean="0"/>
+              <a:t>Գործակցի Բանաձևը</a:t>
+            </a:r>
+            <a:endParaRPr lang="ru-RU" dirty="0"/>
+          </a:p>
+        </p:txBody>
+      </p:sp>
+      <mc:AlternateContent xmlns:mc="http://schemas.openxmlformats.org/markup-compatibility/2006">
+        <mc:Choice xmlns:a14="http://schemas.microsoft.com/office/drawing/2010/main" Requires="a14">
+          <p:sp>
+            <p:nvSpPr>
+              <p:cNvPr id="5" name="Content Placeholder 2"/>
+              <p:cNvSpPr>
+                <a:spLocks noGrp="1"/>
+              </p:cNvSpPr>
+              <p:nvPr>
+                <p:ph idx="1"/>
+              </p:nvPr>
+            </p:nvSpPr>
+            <p:spPr>
+              <a:xfrm>
+                <a:off x="838200" y="3077377"/>
+                <a:ext cx="10515600" cy="757777"/>
+              </a:xfrm>
+            </p:spPr>
+            <p:txBody>
+              <a:bodyPr>
+                <a:normAutofit/>
+              </a:bodyPr>
+              <a:lstStyle/>
+              <a:p>
+                <a:pPr marL="0" indent="0">
+                  <a:buNone/>
+                </a:pPr>
+                <a14:m>
+                  <m:oMathPara xmlns:m="http://schemas.openxmlformats.org/officeDocument/2006/math">
+                    <m:oMathParaPr>
+                      <m:jc m:val="centerGroup"/>
+                    </m:oMathParaPr>
+                    <m:oMath xmlns:m="http://schemas.openxmlformats.org/officeDocument/2006/math">
+                      <m:r>
+                        <a:rPr lang="ru-RU" b="0" i="1"/>
+                        <m:t>𝐿𝐺𝐷</m:t>
+                      </m:r>
+                      <m:r>
+                        <a:rPr lang="ru-RU" b="0" i="1"/>
+                        <m:t> = 1 − [ </m:t>
+                      </m:r>
+                      <m:r>
+                        <a:rPr lang="ru-RU" b="0" i="1"/>
+                        <m:t>𝛴</m:t>
+                      </m:r>
+                      <m:r>
+                        <a:rPr lang="ru-RU" b="0" i="1"/>
+                        <m:t> (</m:t>
+                      </m:r>
+                      <m:r>
+                        <a:rPr lang="ru-RU" b="0" i="1"/>
+                        <m:t>𝐶𝑎𝑠h</m:t>
+                      </m:r>
+                      <m:r>
+                        <a:rPr lang="ru-RU" b="0" i="1"/>
+                        <m:t>_</m:t>
+                      </m:r>
+                      <m:r>
+                        <a:rPr lang="ru-RU" b="0" i="1"/>
+                        <m:t>𝑡</m:t>
+                      </m:r>
+                      <m:r>
+                        <a:rPr lang="ru-RU" b="0" i="1"/>
+                        <m:t> − </m:t>
+                      </m:r>
+                      <m:r>
+                        <a:rPr lang="ru-RU" b="0" i="1"/>
+                        <m:t>𝐶𝑜𝑠𝑡</m:t>
+                      </m:r>
+                      <m:r>
+                        <a:rPr lang="ru-RU" b="0" i="1"/>
+                        <m:t>_</m:t>
+                      </m:r>
+                      <m:r>
+                        <a:rPr lang="ru-RU" b="0" i="1"/>
+                        <m:t>𝑡</m:t>
+                      </m:r>
+                      <m:r>
+                        <a:rPr lang="ru-RU" b="0" i="1"/>
+                        <m:t>) / (1 + </m:t>
+                      </m:r>
+                      <m:r>
+                        <a:rPr lang="ru-RU" b="0" i="1"/>
+                        <m:t>𝑟</m:t>
+                      </m:r>
+                      <m:r>
+                        <a:rPr lang="ru-RU" b="0" i="1"/>
+                        <m:t>)^</m:t>
+                      </m:r>
+                      <m:r>
+                        <a:rPr lang="ru-RU" b="0" i="1"/>
+                        <m:t>𝑡</m:t>
+                      </m:r>
+                      <m:r>
+                        <a:rPr lang="ru-RU" b="0" i="1"/>
+                        <m:t> ] / </m:t>
+                      </m:r>
+                      <m:r>
+                        <a:rPr lang="ru-RU" b="0" i="1"/>
+                        <m:t>𝐸𝐴𝐷</m:t>
+                      </m:r>
+                    </m:oMath>
+                  </m:oMathPara>
+                </a14:m>
+                <a:endParaRPr lang="ru-RU" dirty="0"/>
+              </a:p>
+            </p:txBody>
+          </p:sp>
+        </mc:Choice>
+        <mc:Fallback>
+          <p:sp>
+            <p:nvSpPr>
+              <p:cNvPr id="5" name="Content Placeholder 2"/>
+              <p:cNvSpPr>
+                <a:spLocks noGrp="1" noRot="1" noChangeAspect="1" noMove="1" noResize="1" noEditPoints="1" noAdjustHandles="1" noChangeArrowheads="1" noChangeShapeType="1" noTextEdit="1"/>
+              </p:cNvSpPr>
+              <p:nvPr>
+                <p:ph idx="1"/>
+              </p:nvPr>
+            </p:nvSpPr>
+            <p:spPr>
+              <a:xfrm>
+                <a:off x="838200" y="3077377"/>
+                <a:ext cx="10515600" cy="757777"/>
+              </a:xfrm>
+              <a:blipFill>
+                <a:blip r:embed="rId2"/>
+                <a:stretch>
+                  <a:fillRect/>
+                </a:stretch>
+              </a:blipFill>
+            </p:spPr>
+            <p:txBody>
+              <a:bodyPr/>
+              <a:lstStyle/>
+              <a:p>
+                <a:r>
+                  <a:rPr lang="ru-RU">
+                    <a:noFill/>
+                  </a:rPr>
+                  <a:t> </a:t>
+                </a:r>
+              </a:p>
+            </p:txBody>
+          </p:sp>
+        </mc:Fallback>
+      </mc:AlternateContent>
+    </p:spTree>
+    <p:extLst>
+      <p:ext uri="{BB962C8B-B14F-4D97-AF65-F5344CB8AC3E}">
+        <p14:creationId xmlns:p14="http://schemas.microsoft.com/office/powerpoint/2010/main" val="639266211"/>
+      </p:ext>
+    </p:extLst>
+  </p:cSld>
+  <p:clrMapOvr>
+    <a:masterClrMapping/>
+  </p:clrMapOvr>
+</p:sld>
+</file>
+
+<file path=ppt/slides/slide13.xml><?xml version="1.0" encoding="utf-8"?>
+<p:sld xmlns:a="http://schemas.openxmlformats.org/drawingml/2006/main" xmlns:r="http://schemas.openxmlformats.org/officeDocument/2006/relationships" xmlns:p="http://schemas.openxmlformats.org/presentationml/2006/main">
+  <p:cSld>
+    <p:spTree>
+      <p:nvGrpSpPr>
+        <p:cNvPr id="1" name=""/>
+        <p:cNvGrpSpPr/>
+        <p:nvPr/>
+      </p:nvGrpSpPr>
+      <p:grpSpPr>
+        <a:xfrm>
+          <a:off x="0" y="0"/>
+          <a:ext cx="0" cy="0"/>
+          <a:chOff x="0" y="0"/>
+          <a:chExt cx="0" cy="0"/>
+        </a:xfrm>
+      </p:grpSpPr>
+      <p:sp>
+        <p:nvSpPr>
+          <p:cNvPr id="2" name="Title 1"/>
+          <p:cNvSpPr>
+            <a:spLocks noGrp="1"/>
+          </p:cNvSpPr>
+          <p:nvPr>
+            <p:ph type="title"/>
+          </p:nvPr>
+        </p:nvSpPr>
+        <p:spPr>
+          <a:xfrm>
             <a:off x="485683" y="924419"/>
             <a:ext cx="11238390" cy="1325563"/>
           </a:xfrm>
@@ -3172,8 +4051,8 @@
           </a:p>
         </p:txBody>
       </p:sp>
-      <mc:AlternateContent xmlns:mc="http://schemas.openxmlformats.org/markup-compatibility/2006">
-        <mc:Choice xmlns:a14="http://schemas.microsoft.com/office/drawing/2010/main" Requires="a14">
+      <mc:AlternateContent xmlns:mc="http://schemas.openxmlformats.org/markup-compatibility/2006" xmlns:a14="http://schemas.microsoft.com/office/drawing/2010/main">
+        <mc:Choice Requires="a14">
           <p:sp>
             <p:nvSpPr>
               <p:cNvPr id="3" name="Content Placeholder 2"/>
@@ -3261,7 +4140,7 @@
             </p:txBody>
           </p:sp>
         </mc:Choice>
-        <mc:Fallback>
+        <mc:Fallback xmlns="">
           <p:sp>
             <p:nvSpPr>
               <p:cNvPr id="3" name="Content Placeholder 2"/>
@@ -3312,7 +4191,7 @@
 </p:sld>
 </file>
 
-<file path=ppt/slides/slide11.xml><?xml version="1.0" encoding="utf-8"?>
+<file path=ppt/slides/slide14.xml><?xml version="1.0" encoding="utf-8"?>
 <p:sld xmlns:a="http://schemas.openxmlformats.org/drawingml/2006/main" xmlns:r="http://schemas.openxmlformats.org/officeDocument/2006/relationships" xmlns:p="http://schemas.openxmlformats.org/presentationml/2006/main">
   <p:cSld>
     <p:spTree>
@@ -3341,7 +4220,7 @@
         </p:nvSpPr>
         <p:spPr>
           <a:xfrm>
-            <a:off x="909221" y="1039828"/>
+            <a:off x="838199" y="977684"/>
             <a:ext cx="10515600" cy="1325563"/>
           </a:xfrm>
         </p:spPr>
@@ -3352,735 +4231,40 @@
             <a:pPr algn="ctr"/>
             <a:r>
               <a:rPr lang="en-US" dirty="0" smtClean="0"/>
-              <a:t>PD (</a:t>
-            </a:r>
-            <a:r>
-              <a:rPr lang="en-US" dirty="0"/>
-              <a:t>Probability of </a:t>
-            </a:r>
-            <a:r>
-              <a:rPr lang="en-US" dirty="0" smtClean="0"/>
-              <a:t>Default)-</a:t>
+              <a:t>ECL-</a:t>
             </a:r>
             <a:r>
               <a:rPr lang="hy-AM" dirty="0" smtClean="0"/>
-              <a:t>ի Բանաձևը</a:t>
+              <a:t>ի Հաշվարկման Ալգորիթմը</a:t>
             </a:r>
             <a:endParaRPr lang="ru-RU" dirty="0"/>
           </a:p>
         </p:txBody>
       </p:sp>
-      <mc:AlternateContent xmlns:mc="http://schemas.openxmlformats.org/markup-compatibility/2006">
-        <mc:Choice xmlns:a14="http://schemas.microsoft.com/office/drawing/2010/main" Requires="a14">
-          <p:sp>
-            <p:nvSpPr>
-              <p:cNvPr id="3" name="Content Placeholder 2"/>
-              <p:cNvSpPr>
-                <a:spLocks noGrp="1"/>
-              </p:cNvSpPr>
-              <p:nvPr>
-                <p:ph idx="1"/>
-              </p:nvPr>
-            </p:nvSpPr>
-            <p:spPr>
-              <a:xfrm>
-                <a:off x="909221" y="2660126"/>
-                <a:ext cx="10515600" cy="1938507"/>
-              </a:xfrm>
-            </p:spPr>
-            <p:txBody>
-              <a:bodyPr/>
-              <a:lstStyle/>
-              <a:p>
-                <a:pPr marL="0" indent="0" algn="ctr">
-                  <a:buNone/>
-                </a:pPr>
-                <a:r>
-                  <a:rPr lang="hy-AM" sz="4000" dirty="0"/>
-                  <a:t>Սի</a:t>
-                </a:r>
-                <a:r>
-                  <a:rPr lang="hy-AM" sz="4000" dirty="0" smtClean="0"/>
-                  <a:t>գմոիդ ֆունկցիա: </a:t>
-                </a:r>
-                <a14:m>
-                  <m:oMath xmlns:m="http://schemas.openxmlformats.org/officeDocument/2006/math">
-                    <m:r>
-                      <m:rPr>
-                        <m:sty m:val="p"/>
-                      </m:rPr>
-                      <a:rPr lang="hy-AM" sz="4000"/>
-                      <m:t>σ</m:t>
-                    </m:r>
-                    <m:d>
-                      <m:dPr>
-                        <m:ctrlPr>
-                          <a:rPr lang="ru-RU" sz="4000" i="1"/>
-                        </m:ctrlPr>
-                      </m:dPr>
-                      <m:e>
-                        <m:r>
-                          <m:rPr>
-                            <m:sty m:val="p"/>
-                          </m:rPr>
-                          <a:rPr lang="hy-AM" sz="4000"/>
-                          <m:t>z</m:t>
-                        </m:r>
-                      </m:e>
-                    </m:d>
-                    <m:r>
-                      <a:rPr lang="hy-AM" sz="4000"/>
-                      <m:t>=</m:t>
-                    </m:r>
-                    <m:f>
-                      <m:fPr>
-                        <m:ctrlPr>
-                          <a:rPr lang="ru-RU" sz="4000" i="1"/>
-                        </m:ctrlPr>
-                      </m:fPr>
-                      <m:num>
-                        <m:r>
-                          <a:rPr lang="hy-AM" sz="4000"/>
-                          <m:t>1</m:t>
-                        </m:r>
-                      </m:num>
-                      <m:den>
-                        <m:r>
-                          <a:rPr lang="hy-AM" sz="4000"/>
-                          <m:t>1+</m:t>
-                        </m:r>
-                        <m:sSup>
-                          <m:sSupPr>
-                            <m:ctrlPr>
-                              <a:rPr lang="ru-RU" sz="4000" i="1"/>
-                            </m:ctrlPr>
-                          </m:sSupPr>
-                          <m:e>
-                            <m:r>
-                              <m:rPr>
-                                <m:sty m:val="p"/>
-                              </m:rPr>
-                              <a:rPr lang="hy-AM" sz="4000"/>
-                              <m:t>e</m:t>
-                            </m:r>
-                          </m:e>
-                          <m:sup>
-                            <m:r>
-                              <a:rPr lang="hy-AM" sz="4000" i="1"/>
-                              <m:t>−</m:t>
-                            </m:r>
-                            <m:r>
-                              <m:rPr>
-                                <m:sty m:val="p"/>
-                              </m:rPr>
-                              <a:rPr lang="hy-AM" sz="4000"/>
-                              <m:t>z</m:t>
-                            </m:r>
-                          </m:sup>
-                        </m:sSup>
-                      </m:den>
-                    </m:f>
-                  </m:oMath>
-                </a14:m>
-                <a:endParaRPr lang="ru-RU" sz="4000" dirty="0"/>
-              </a:p>
-              <a:p>
-                <a:pPr marL="0" indent="0" algn="ctr">
-                  <a:buNone/>
-                </a:pPr>
-                <a14:m>
-                  <m:oMathPara xmlns:m="http://schemas.openxmlformats.org/officeDocument/2006/math">
-                    <m:oMathParaPr>
-                      <m:jc m:val="centerGroup"/>
-                    </m:oMathParaPr>
-                    <m:oMath xmlns:m="http://schemas.openxmlformats.org/officeDocument/2006/math">
-                      <m:r>
-                        <a:rPr lang="hy-AM" sz="4000" i="1"/>
-                        <m:t>𝑃</m:t>
-                      </m:r>
-                      <m:d>
-                        <m:dPr>
-                          <m:ctrlPr>
-                            <a:rPr lang="ru-RU" sz="4000" i="1"/>
-                          </m:ctrlPr>
-                        </m:dPr>
-                        <m:e>
-                          <m:r>
-                            <a:rPr lang="hy-AM" sz="4000" i="1"/>
-                            <m:t>𝑦</m:t>
-                          </m:r>
-                          <m:r>
-                            <a:rPr lang="hy-AM" sz="4000" i="1"/>
-                            <m:t>=1</m:t>
-                          </m:r>
-                        </m:e>
-                        <m:e>
-                          <m:r>
-                            <a:rPr lang="hy-AM" sz="4000" i="1"/>
-                            <m:t>𝑋</m:t>
-                          </m:r>
-                        </m:e>
-                      </m:d>
-                      <m:r>
-                        <a:rPr lang="hy-AM" sz="4000" i="1"/>
-                        <m:t>=</m:t>
-                      </m:r>
-                      <m:r>
-                        <a:rPr lang="hy-AM" sz="4000" i="1"/>
-                        <m:t>𝜎</m:t>
-                      </m:r>
-                      <m:d>
-                        <m:dPr>
-                          <m:ctrlPr>
-                            <a:rPr lang="ru-RU" sz="4000" i="1"/>
-                          </m:ctrlPr>
-                        </m:dPr>
-                        <m:e>
-                          <m:sSub>
-                            <m:sSubPr>
-                              <m:ctrlPr>
-                                <a:rPr lang="ru-RU" sz="4000" i="1"/>
-                              </m:ctrlPr>
-                            </m:sSubPr>
-                            <m:e>
-                              <m:r>
-                                <a:rPr lang="hy-AM" sz="4000" i="1"/>
-                                <m:t>𝛽</m:t>
-                              </m:r>
-                            </m:e>
-                            <m:sub>
-                              <m:r>
-                                <a:rPr lang="hy-AM" sz="4000" i="1"/>
-                                <m:t>0</m:t>
-                              </m:r>
-                            </m:sub>
-                          </m:sSub>
-                          <m:r>
-                            <a:rPr lang="hy-AM" sz="4000" i="1"/>
-                            <m:t>+</m:t>
-                          </m:r>
-                          <m:sSub>
-                            <m:sSubPr>
-                              <m:ctrlPr>
-                                <a:rPr lang="ru-RU" sz="4000" i="1"/>
-                              </m:ctrlPr>
-                            </m:sSubPr>
-                            <m:e>
-                              <m:r>
-                                <a:rPr lang="hy-AM" sz="4000" i="1"/>
-                                <m:t>𝛽</m:t>
-                              </m:r>
-                            </m:e>
-                            <m:sub>
-                              <m:r>
-                                <a:rPr lang="hy-AM" sz="4000" i="1"/>
-                                <m:t>1</m:t>
-                              </m:r>
-                            </m:sub>
-                          </m:sSub>
-                          <m:sSub>
-                            <m:sSubPr>
-                              <m:ctrlPr>
-                                <a:rPr lang="ru-RU" sz="4000" i="1"/>
-                              </m:ctrlPr>
-                            </m:sSubPr>
-                            <m:e>
-                              <m:r>
-                                <a:rPr lang="hy-AM" sz="4000" i="1"/>
-                                <m:t>𝑥</m:t>
-                              </m:r>
-                            </m:e>
-                            <m:sub>
-                              <m:r>
-                                <a:rPr lang="hy-AM" sz="4000" i="1"/>
-                                <m:t>1</m:t>
-                              </m:r>
-                            </m:sub>
-                          </m:sSub>
-                          <m:r>
-                            <a:rPr lang="hy-AM" sz="4000" i="1"/>
-                            <m:t>+</m:t>
-                          </m:r>
-                          <m:sSub>
-                            <m:sSubPr>
-                              <m:ctrlPr>
-                                <a:rPr lang="ru-RU" sz="4000" i="1"/>
-                              </m:ctrlPr>
-                            </m:sSubPr>
-                            <m:e>
-                              <m:r>
-                                <a:rPr lang="hy-AM" sz="4000" i="1"/>
-                                <m:t>𝛽</m:t>
-                              </m:r>
-                            </m:e>
-                            <m:sub>
-                              <m:r>
-                                <a:rPr lang="hy-AM" sz="4000" i="1"/>
-                                <m:t>2</m:t>
-                              </m:r>
-                            </m:sub>
-                          </m:sSub>
-                          <m:sSub>
-                            <m:sSubPr>
-                              <m:ctrlPr>
-                                <a:rPr lang="ru-RU" sz="4000" i="1"/>
-                              </m:ctrlPr>
-                            </m:sSubPr>
-                            <m:e>
-                              <m:r>
-                                <a:rPr lang="hy-AM" sz="4000" i="1"/>
-                                <m:t>𝑥</m:t>
-                              </m:r>
-                            </m:e>
-                            <m:sub>
-                              <m:r>
-                                <a:rPr lang="hy-AM" sz="4000" i="1"/>
-                                <m:t>2</m:t>
-                              </m:r>
-                            </m:sub>
-                          </m:sSub>
-                          <m:r>
-                            <a:rPr lang="hy-AM" sz="4000" i="1"/>
-                            <m:t>+…+</m:t>
-                          </m:r>
-                          <m:sSub>
-                            <m:sSubPr>
-                              <m:ctrlPr>
-                                <a:rPr lang="ru-RU" sz="4000" i="1"/>
-                              </m:ctrlPr>
-                            </m:sSubPr>
-                            <m:e>
-                              <m:r>
-                                <a:rPr lang="hy-AM" sz="4000" i="1"/>
-                                <m:t>𝛽</m:t>
-                              </m:r>
-                            </m:e>
-                            <m:sub>
-                              <m:r>
-                                <a:rPr lang="hy-AM" sz="4000" i="1"/>
-                                <m:t>𝑛</m:t>
-                              </m:r>
-                            </m:sub>
-                          </m:sSub>
-                          <m:sSub>
-                            <m:sSubPr>
-                              <m:ctrlPr>
-                                <a:rPr lang="ru-RU" sz="4000" i="1"/>
-                              </m:ctrlPr>
-                            </m:sSubPr>
-                            <m:e>
-                              <m:r>
-                                <a:rPr lang="hy-AM" sz="4000" i="1"/>
-                                <m:t>𝑥</m:t>
-                              </m:r>
-                            </m:e>
-                            <m:sub>
-                              <m:r>
-                                <a:rPr lang="hy-AM" sz="4000" i="1"/>
-                                <m:t>𝑛</m:t>
-                              </m:r>
-                            </m:sub>
-                          </m:sSub>
-                        </m:e>
-                      </m:d>
-                    </m:oMath>
-                  </m:oMathPara>
-                </a14:m>
-                <a:endParaRPr lang="ru-RU" dirty="0"/>
-              </a:p>
-            </p:txBody>
-          </p:sp>
-        </mc:Choice>
-        <mc:Fallback>
-          <p:sp>
-            <p:nvSpPr>
-              <p:cNvPr id="3" name="Content Placeholder 2"/>
-              <p:cNvSpPr>
-                <a:spLocks noGrp="1" noRot="1" noChangeAspect="1" noMove="1" noResize="1" noEditPoints="1" noAdjustHandles="1" noChangeArrowheads="1" noChangeShapeType="1" noTextEdit="1"/>
-              </p:cNvSpPr>
-              <p:nvPr>
-                <p:ph idx="1"/>
-              </p:nvPr>
-            </p:nvSpPr>
-            <p:spPr>
-              <a:xfrm>
-                <a:off x="909221" y="2660126"/>
-                <a:ext cx="10515600" cy="1938507"/>
-              </a:xfrm>
-              <a:blipFill>
-                <a:blip r:embed="rId2"/>
-                <a:stretch>
-                  <a:fillRect t="-1572"/>
-                </a:stretch>
-              </a:blipFill>
-            </p:spPr>
-            <p:txBody>
-              <a:bodyPr/>
-              <a:lstStyle/>
-              <a:p>
-                <a:r>
-                  <a:rPr lang="ru-RU">
-                    <a:noFill/>
-                  </a:rPr>
-                  <a:t> </a:t>
-                </a:r>
-              </a:p>
-            </p:txBody>
-          </p:sp>
-        </mc:Fallback>
-      </mc:AlternateContent>
-    </p:spTree>
-    <p:extLst>
-      <p:ext uri="{BB962C8B-B14F-4D97-AF65-F5344CB8AC3E}">
-        <p14:creationId xmlns:p14="http://schemas.microsoft.com/office/powerpoint/2010/main" val="3870628688"/>
-      </p:ext>
-    </p:extLst>
-  </p:cSld>
-  <p:clrMapOvr>
-    <a:masterClrMapping/>
-  </p:clrMapOvr>
-</p:sld>
-</file>
-
-<file path=ppt/slides/slide12.xml><?xml version="1.0" encoding="utf-8"?>
-<p:sld xmlns:a="http://schemas.openxmlformats.org/drawingml/2006/main" xmlns:r="http://schemas.openxmlformats.org/officeDocument/2006/relationships" xmlns:p="http://schemas.openxmlformats.org/presentationml/2006/main">
-  <p:cSld>
-    <p:spTree>
-      <p:nvGrpSpPr>
-        <p:cNvPr id="1" name=""/>
-        <p:cNvGrpSpPr/>
-        <p:nvPr/>
-      </p:nvGrpSpPr>
-      <p:grpSpPr>
-        <a:xfrm>
-          <a:off x="0" y="0"/>
-          <a:ext cx="0" cy="0"/>
-          <a:chOff x="0" y="0"/>
-          <a:chExt cx="0" cy="0"/>
-        </a:xfrm>
-      </p:grpSpPr>
-      <p:sp>
-        <p:nvSpPr>
-          <p:cNvPr id="2" name="Title 1"/>
-          <p:cNvSpPr>
-            <a:spLocks noGrp="1"/>
-          </p:cNvSpPr>
-          <p:nvPr>
-            <p:ph type="title"/>
-          </p:nvPr>
-        </p:nvSpPr>
+      <p:pic>
+        <p:nvPicPr>
+          <p:cNvPr id="7" name="Picture 6"/>
+          <p:cNvPicPr>
+            <a:picLocks noChangeAspect="1"/>
+          </p:cNvPicPr>
+          <p:nvPr/>
+        </p:nvPicPr>
+        <p:blipFill>
+          <a:blip r:embed="rId2"/>
+          <a:stretch>
+            <a:fillRect/>
+          </a:stretch>
+        </p:blipFill>
         <p:spPr>
           <a:xfrm>
-            <a:off x="838200" y="915541"/>
-            <a:ext cx="10515600" cy="1325563"/>
+            <a:off x="294464" y="2769107"/>
+            <a:ext cx="11603069" cy="1781424"/>
           </a:xfrm>
+          <a:prstGeom prst="rect">
+            <a:avLst/>
+          </a:prstGeom>
         </p:spPr>
-        <p:txBody>
-          <a:bodyPr/>
-          <a:lstStyle/>
-          <a:p>
-            <a:pPr algn="ctr"/>
-            <a:r>
-              <a:rPr lang="hy-AM" dirty="0"/>
-              <a:t>EAD </a:t>
-            </a:r>
-            <a:r>
-              <a:rPr lang="hy-AM" dirty="0" smtClean="0"/>
-              <a:t>Գործակցի Բանաձևը</a:t>
-            </a:r>
-            <a:endParaRPr lang="ru-RU" dirty="0"/>
-          </a:p>
-        </p:txBody>
-      </p:sp>
-      <mc:AlternateContent xmlns:mc="http://schemas.openxmlformats.org/markup-compatibility/2006">
-        <mc:Choice xmlns:a14="http://schemas.microsoft.com/office/drawing/2010/main" Requires="a14">
-          <p:sp>
-            <p:nvSpPr>
-              <p:cNvPr id="3" name="Content Placeholder 2"/>
-              <p:cNvSpPr>
-                <a:spLocks noGrp="1"/>
-              </p:cNvSpPr>
-              <p:nvPr>
-                <p:ph idx="1"/>
-              </p:nvPr>
-            </p:nvSpPr>
-            <p:spPr>
-              <a:xfrm>
-                <a:off x="838200" y="3077377"/>
-                <a:ext cx="10515600" cy="757777"/>
-              </a:xfrm>
-            </p:spPr>
-            <p:txBody>
-              <a:bodyPr>
-                <a:normAutofit/>
-              </a:bodyPr>
-              <a:lstStyle/>
-              <a:p>
-                <a:pPr marL="0" indent="0">
-                  <a:buNone/>
-                </a:pPr>
-                <a14:m>
-                  <m:oMathPara xmlns:m="http://schemas.openxmlformats.org/officeDocument/2006/math">
-                    <m:oMathParaPr>
-                      <m:jc m:val="centerGroup"/>
-                    </m:oMathParaPr>
-                    <m:oMath xmlns:m="http://schemas.openxmlformats.org/officeDocument/2006/math">
-                      <m:r>
-                        <a:rPr lang="hy-AM" sz="3200" i="1"/>
-                        <m:t>𝐸𝐴𝐷</m:t>
-                      </m:r>
-                      <m:r>
-                        <a:rPr lang="hy-AM" sz="3200" i="1"/>
-                        <m:t>=</m:t>
-                      </m:r>
-                      <m:r>
-                        <a:rPr lang="hy-AM" sz="3200" i="1"/>
-                        <m:t>𝐷𝑟𝑎𝑤𝑛</m:t>
-                      </m:r>
-                      <m:r>
-                        <a:rPr lang="hy-AM" sz="3200" i="1"/>
-                        <m:t> </m:t>
-                      </m:r>
-                      <m:r>
-                        <a:rPr lang="hy-AM" sz="3200" i="1"/>
-                        <m:t>𝐴𝑚𝑜𝑢𝑛𝑡</m:t>
-                      </m:r>
-                      <m:r>
-                        <a:rPr lang="hy-AM" sz="3200" i="1"/>
-                        <m:t>+(</m:t>
-                      </m:r>
-                      <m:r>
-                        <a:rPr lang="hy-AM" sz="3200" i="1"/>
-                        <m:t>𝐶𝐶𝐹</m:t>
-                      </m:r>
-                      <m:r>
-                        <a:rPr lang="hy-AM" sz="3200" i="1"/>
-                        <m:t>×</m:t>
-                      </m:r>
-                      <m:r>
-                        <a:rPr lang="hy-AM" sz="3200" i="1"/>
-                        <m:t>𝑈𝑛𝑑𝑟𝑎𝑤𝑛</m:t>
-                      </m:r>
-                      <m:r>
-                        <a:rPr lang="hy-AM" sz="3200" i="1"/>
-                        <m:t> </m:t>
-                      </m:r>
-                      <m:r>
-                        <a:rPr lang="hy-AM" sz="3200" i="1"/>
-                        <m:t>𝐴𝑚𝑜𝑢𝑛𝑡</m:t>
-                      </m:r>
-                      <m:r>
-                        <a:rPr lang="hy-AM" sz="3200" i="1"/>
-                        <m:t>)</m:t>
-                      </m:r>
-                    </m:oMath>
-                  </m:oMathPara>
-                </a14:m>
-                <a:endParaRPr lang="ru-RU" sz="3200" dirty="0"/>
-              </a:p>
-            </p:txBody>
-          </p:sp>
-        </mc:Choice>
-        <mc:Fallback>
-          <p:sp>
-            <p:nvSpPr>
-              <p:cNvPr id="3" name="Content Placeholder 2"/>
-              <p:cNvSpPr>
-                <a:spLocks noGrp="1" noRot="1" noChangeAspect="1" noMove="1" noResize="1" noEditPoints="1" noAdjustHandles="1" noChangeArrowheads="1" noChangeShapeType="1" noTextEdit="1"/>
-              </p:cNvSpPr>
-              <p:nvPr>
-                <p:ph idx="1"/>
-              </p:nvPr>
-            </p:nvSpPr>
-            <p:spPr>
-              <a:xfrm>
-                <a:off x="838200" y="3077377"/>
-                <a:ext cx="10515600" cy="757777"/>
-              </a:xfrm>
-              <a:blipFill>
-                <a:blip r:embed="rId2"/>
-                <a:stretch>
-                  <a:fillRect/>
-                </a:stretch>
-              </a:blipFill>
-            </p:spPr>
-            <p:txBody>
-              <a:bodyPr/>
-              <a:lstStyle/>
-              <a:p>
-                <a:r>
-                  <a:rPr lang="ru-RU">
-                    <a:noFill/>
-                  </a:rPr>
-                  <a:t> </a:t>
-                </a:r>
-              </a:p>
-            </p:txBody>
-          </p:sp>
-        </mc:Fallback>
-      </mc:AlternateContent>
-    </p:spTree>
-    <p:extLst>
-      <p:ext uri="{BB962C8B-B14F-4D97-AF65-F5344CB8AC3E}">
-        <p14:creationId xmlns:p14="http://schemas.microsoft.com/office/powerpoint/2010/main" val="1495527178"/>
-      </p:ext>
-    </p:extLst>
-  </p:cSld>
-  <p:clrMapOvr>
-    <a:masterClrMapping/>
-  </p:clrMapOvr>
-</p:sld>
-</file>
-
-<file path=ppt/slides/slide13.xml><?xml version="1.0" encoding="utf-8"?>
-<p:sld xmlns:a="http://schemas.openxmlformats.org/drawingml/2006/main" xmlns:r="http://schemas.openxmlformats.org/officeDocument/2006/relationships" xmlns:p="http://schemas.openxmlformats.org/presentationml/2006/main">
-  <p:cSld>
-    <p:spTree>
-      <p:nvGrpSpPr>
-        <p:cNvPr id="1" name=""/>
-        <p:cNvGrpSpPr/>
-        <p:nvPr/>
-      </p:nvGrpSpPr>
-      <p:grpSpPr>
-        <a:xfrm>
-          <a:off x="0" y="0"/>
-          <a:ext cx="0" cy="0"/>
-          <a:chOff x="0" y="0"/>
-          <a:chExt cx="0" cy="0"/>
-        </a:xfrm>
-      </p:grpSpPr>
-      <p:sp>
-        <p:nvSpPr>
-          <p:cNvPr id="2" name="Title 1"/>
-          <p:cNvSpPr>
-            <a:spLocks noGrp="1"/>
-          </p:cNvSpPr>
-          <p:nvPr>
-            <p:ph type="title"/>
-          </p:nvPr>
-        </p:nvSpPr>
-        <p:spPr>
-          <a:xfrm>
-            <a:off x="838200" y="214204"/>
-            <a:ext cx="10515600" cy="1325563"/>
-          </a:xfrm>
-        </p:spPr>
-        <p:txBody>
-          <a:bodyPr/>
-          <a:lstStyle/>
-          <a:p>
-            <a:pPr algn="ctr"/>
-            <a:r>
-              <a:rPr lang="en-US" dirty="0" smtClean="0"/>
-              <a:t>ECL-</a:t>
-            </a:r>
-            <a:r>
-              <a:rPr lang="hy-AM" dirty="0" smtClean="0"/>
-              <a:t>ի Հաշվարկման Ալգորիթմը</a:t>
-            </a:r>
-            <a:endParaRPr lang="ru-RU" dirty="0"/>
-          </a:p>
-        </p:txBody>
-      </p:sp>
-      <p:sp>
-        <p:nvSpPr>
-          <p:cNvPr id="3" name="Content Placeholder 2"/>
-          <p:cNvSpPr>
-            <a:spLocks noGrp="1"/>
-          </p:cNvSpPr>
-          <p:nvPr>
-            <p:ph idx="1"/>
-          </p:nvPr>
-        </p:nvSpPr>
-        <p:spPr>
-          <a:xfrm>
-            <a:off x="838200" y="1656949"/>
-            <a:ext cx="10515600" cy="4351338"/>
-          </a:xfrm>
-        </p:spPr>
-        <p:txBody>
-          <a:bodyPr>
-            <a:noAutofit/>
-          </a:bodyPr>
-          <a:lstStyle/>
-          <a:p>
-            <a:pPr lvl="0"/>
-            <a:r>
-              <a:rPr lang="hy-AM" sz="3600" dirty="0"/>
-              <a:t>Staging</a:t>
-            </a:r>
-            <a:endParaRPr lang="ru-RU" sz="3600" dirty="0"/>
-          </a:p>
-          <a:p>
-            <a:pPr lvl="0"/>
-            <a:r>
-              <a:rPr lang="hy-AM" sz="3600" dirty="0"/>
-              <a:t>CCF</a:t>
-            </a:r>
-            <a:endParaRPr lang="ru-RU" sz="3600" dirty="0"/>
-          </a:p>
-          <a:p>
-            <a:pPr lvl="0"/>
-            <a:r>
-              <a:rPr lang="hy-AM" sz="3600" dirty="0"/>
-              <a:t>MPD – PD</a:t>
-            </a:r>
-            <a:endParaRPr lang="ru-RU" sz="3600" dirty="0"/>
-          </a:p>
-          <a:p>
-            <a:pPr lvl="0"/>
-            <a:r>
-              <a:rPr lang="hy-AM" sz="3600" dirty="0"/>
-              <a:t>EAD-ի ստացում</a:t>
-            </a:r>
-            <a:endParaRPr lang="ru-RU" sz="3600" dirty="0"/>
-          </a:p>
-          <a:p>
-            <a:pPr lvl="0"/>
-            <a:r>
-              <a:rPr lang="hy-AM" sz="3600" dirty="0"/>
-              <a:t>LGD-Eco</a:t>
-            </a:r>
-            <a:r>
-              <a:rPr lang="en-US" sz="3600" dirty="0"/>
-              <a:t>n</a:t>
-            </a:r>
-            <a:r>
-              <a:rPr lang="hy-AM" sz="3600" dirty="0"/>
-              <a:t> ստացում</a:t>
-            </a:r>
-            <a:endParaRPr lang="ru-RU" sz="3600" dirty="0"/>
-          </a:p>
-          <a:p>
-            <a:pPr lvl="0"/>
-            <a:r>
-              <a:rPr lang="hy-AM" sz="3600" dirty="0"/>
-              <a:t>LGD-Stat-ի ստացում</a:t>
-            </a:r>
-            <a:endParaRPr lang="ru-RU" sz="3600" dirty="0"/>
-          </a:p>
-          <a:p>
-            <a:pPr lvl="0"/>
-            <a:r>
-              <a:rPr lang="hy-AM" sz="3600" dirty="0"/>
-              <a:t>ECL</a:t>
-            </a:r>
-            <a:r>
-              <a:rPr lang="en-US" sz="3600" dirty="0"/>
-              <a:t>-</a:t>
-            </a:r>
-            <a:r>
-              <a:rPr lang="hy-AM" sz="3600" dirty="0"/>
-              <a:t>ի </a:t>
-            </a:r>
-            <a:r>
-              <a:rPr lang="hy-AM" sz="3600" dirty="0" smtClean="0"/>
-              <a:t>ստացում</a:t>
-            </a:r>
-            <a:endParaRPr lang="ru-RU" sz="3600" dirty="0"/>
-          </a:p>
-        </p:txBody>
-      </p:sp>
+      </p:pic>
     </p:spTree>
     <p:extLst>
       <p:ext uri="{BB962C8B-B14F-4D97-AF65-F5344CB8AC3E}">
@@ -4094,7 +4278,7 @@
 </p:sld>
 </file>
 
-<file path=ppt/slides/slide14.xml><?xml version="1.0" encoding="utf-8"?>
+<file path=ppt/slides/slide15.xml><?xml version="1.0" encoding="utf-8"?>
 <p:sld xmlns:a="http://schemas.openxmlformats.org/drawingml/2006/main" xmlns:r="http://schemas.openxmlformats.org/officeDocument/2006/relationships" xmlns:p="http://schemas.openxmlformats.org/presentationml/2006/main">
   <p:cSld>
     <p:spTree>
@@ -4167,6 +4351,118 @@
 </file>
 
 <file path=ppt/slides/slide2.xml><?xml version="1.0" encoding="utf-8"?>
+<p:sld xmlns:a="http://schemas.openxmlformats.org/drawingml/2006/main" xmlns:r="http://schemas.openxmlformats.org/officeDocument/2006/relationships" xmlns:p="http://schemas.openxmlformats.org/presentationml/2006/main">
+  <p:cSld>
+    <p:spTree>
+      <p:nvGrpSpPr>
+        <p:cNvPr id="1" name=""/>
+        <p:cNvGrpSpPr/>
+        <p:nvPr/>
+      </p:nvGrpSpPr>
+      <p:grpSpPr>
+        <a:xfrm>
+          <a:off x="0" y="0"/>
+          <a:ext cx="0" cy="0"/>
+          <a:chOff x="0" y="0"/>
+          <a:chExt cx="0" cy="0"/>
+        </a:xfrm>
+      </p:grpSpPr>
+      <p:sp>
+        <p:nvSpPr>
+          <p:cNvPr id="2" name="Title 1"/>
+          <p:cNvSpPr>
+            <a:spLocks noGrp="1"/>
+          </p:cNvSpPr>
+          <p:nvPr>
+            <p:ph type="title"/>
+          </p:nvPr>
+        </p:nvSpPr>
+        <p:spPr/>
+        <p:txBody>
+          <a:bodyPr/>
+          <a:lstStyle/>
+          <a:p>
+            <a:pPr algn="ctr"/>
+            <a:r>
+              <a:rPr lang="hy-AM" dirty="0" smtClean="0">
+                <a:latin typeface="Stylafen"/>
+              </a:rPr>
+              <a:t>Խնդրի Դրվածք</a:t>
+            </a:r>
+            <a:br>
+              <a:rPr lang="hy-AM" dirty="0" smtClean="0">
+                <a:latin typeface="Stylafen"/>
+              </a:rPr>
+            </a:br>
+            <a:r>
+              <a:rPr lang="hy-AM" sz="3600" dirty="0" smtClean="0">
+                <a:latin typeface="Stylafen"/>
+              </a:rPr>
+              <a:t>Վարկային ռիսկի մոդելավորում</a:t>
+            </a:r>
+            <a:r>
+              <a:rPr lang="en-US" sz="3600" dirty="0" smtClean="0">
+                <a:latin typeface="Stylafen"/>
+              </a:rPr>
+              <a:t> </a:t>
+            </a:r>
+            <a:endParaRPr lang="ru-RU" sz="3600" dirty="0">
+              <a:latin typeface="Stylafen"/>
+            </a:endParaRPr>
+          </a:p>
+        </p:txBody>
+      </p:sp>
+      <p:pic>
+        <p:nvPicPr>
+          <p:cNvPr id="3" name="Picture 2"/>
+          <p:cNvPicPr>
+            <a:picLocks noChangeAspect="1"/>
+          </p:cNvPicPr>
+          <p:nvPr/>
+        </p:nvPicPr>
+        <p:blipFill>
+          <a:blip r:embed="rId2">
+            <a:extLst>
+              <a:ext uri="{28A0092B-C50C-407E-A947-70E740481C1C}">
+                <a14:useLocalDpi xmlns:a14="http://schemas.microsoft.com/office/drawing/2010/main" val="0"/>
+              </a:ext>
+            </a:extLst>
+          </a:blip>
+          <a:stretch>
+            <a:fillRect/>
+          </a:stretch>
+        </p:blipFill>
+        <p:spPr>
+          <a:xfrm>
+            <a:off x="1192936" y="1992529"/>
+            <a:ext cx="9806127" cy="4118574"/>
+          </a:xfrm>
+          <a:prstGeom prst="rect">
+            <a:avLst/>
+          </a:prstGeom>
+        </p:spPr>
+      </p:pic>
+    </p:spTree>
+    <p:extLst>
+      <p:ext uri="{BB962C8B-B14F-4D97-AF65-F5344CB8AC3E}">
+        <p14:creationId xmlns:p14="http://schemas.microsoft.com/office/powerpoint/2010/main" val="1881218511"/>
+      </p:ext>
+    </p:extLst>
+  </p:cSld>
+  <p:clrMapOvr>
+    <a:masterClrMapping/>
+  </p:clrMapOvr>
+  <p:timing>
+    <p:tnLst>
+      <p:par>
+        <p:cTn id="1" dur="indefinite" restart="never" nodeType="tmRoot"/>
+      </p:par>
+    </p:tnLst>
+  </p:timing>
+</p:sld>
+</file>
+
+<file path=ppt/slides/slide3.xml><?xml version="1.0" encoding="utf-8"?>
 <p:sld xmlns:a="http://schemas.openxmlformats.org/drawingml/2006/main" xmlns:r="http://schemas.openxmlformats.org/officeDocument/2006/relationships" xmlns:p="http://schemas.openxmlformats.org/presentationml/2006/main">
   <p:cSld>
     <p:spTree>
@@ -4284,118 +4580,6 @@
   <p:clrMapOvr>
     <a:masterClrMapping/>
   </p:clrMapOvr>
-</p:sld>
-</file>
-
-<file path=ppt/slides/slide3.xml><?xml version="1.0" encoding="utf-8"?>
-<p:sld xmlns:a="http://schemas.openxmlformats.org/drawingml/2006/main" xmlns:r="http://schemas.openxmlformats.org/officeDocument/2006/relationships" xmlns:p="http://schemas.openxmlformats.org/presentationml/2006/main">
-  <p:cSld>
-    <p:spTree>
-      <p:nvGrpSpPr>
-        <p:cNvPr id="1" name=""/>
-        <p:cNvGrpSpPr/>
-        <p:nvPr/>
-      </p:nvGrpSpPr>
-      <p:grpSpPr>
-        <a:xfrm>
-          <a:off x="0" y="0"/>
-          <a:ext cx="0" cy="0"/>
-          <a:chOff x="0" y="0"/>
-          <a:chExt cx="0" cy="0"/>
-        </a:xfrm>
-      </p:grpSpPr>
-      <p:sp>
-        <p:nvSpPr>
-          <p:cNvPr id="2" name="Title 1"/>
-          <p:cNvSpPr>
-            <a:spLocks noGrp="1"/>
-          </p:cNvSpPr>
-          <p:nvPr>
-            <p:ph type="title"/>
-          </p:nvPr>
-        </p:nvSpPr>
-        <p:spPr/>
-        <p:txBody>
-          <a:bodyPr/>
-          <a:lstStyle/>
-          <a:p>
-            <a:pPr algn="ctr"/>
-            <a:r>
-              <a:rPr lang="hy-AM" dirty="0" smtClean="0">
-                <a:latin typeface="Stylafen"/>
-              </a:rPr>
-              <a:t>Խնդրի Դրվածք</a:t>
-            </a:r>
-            <a:br>
-              <a:rPr lang="hy-AM" dirty="0" smtClean="0">
-                <a:latin typeface="Stylafen"/>
-              </a:rPr>
-            </a:br>
-            <a:r>
-              <a:rPr lang="hy-AM" sz="3600" dirty="0" smtClean="0">
-                <a:latin typeface="Stylafen"/>
-              </a:rPr>
-              <a:t>Վարկային ռիսկի մոդելավորում</a:t>
-            </a:r>
-            <a:r>
-              <a:rPr lang="en-US" sz="3600" dirty="0" smtClean="0">
-                <a:latin typeface="Stylafen"/>
-              </a:rPr>
-              <a:t> </a:t>
-            </a:r>
-            <a:endParaRPr lang="ru-RU" sz="3600" dirty="0">
-              <a:latin typeface="Stylafen"/>
-            </a:endParaRPr>
-          </a:p>
-        </p:txBody>
-      </p:sp>
-      <p:pic>
-        <p:nvPicPr>
-          <p:cNvPr id="3" name="Picture 2"/>
-          <p:cNvPicPr>
-            <a:picLocks noChangeAspect="1"/>
-          </p:cNvPicPr>
-          <p:nvPr/>
-        </p:nvPicPr>
-        <p:blipFill>
-          <a:blip r:embed="rId2">
-            <a:extLst>
-              <a:ext uri="{28A0092B-C50C-407E-A947-70E740481C1C}">
-                <a14:useLocalDpi xmlns:a14="http://schemas.microsoft.com/office/drawing/2010/main" val="0"/>
-              </a:ext>
-            </a:extLst>
-          </a:blip>
-          <a:stretch>
-            <a:fillRect/>
-          </a:stretch>
-        </p:blipFill>
-        <p:spPr>
-          <a:xfrm>
-            <a:off x="1192936" y="1992529"/>
-            <a:ext cx="9806127" cy="4118574"/>
-          </a:xfrm>
-          <a:prstGeom prst="rect">
-            <a:avLst/>
-          </a:prstGeom>
-        </p:spPr>
-      </p:pic>
-    </p:spTree>
-    <p:extLst>
-      <p:ext uri="{BB962C8B-B14F-4D97-AF65-F5344CB8AC3E}">
-        <p14:creationId xmlns:p14="http://schemas.microsoft.com/office/powerpoint/2010/main" val="1881218511"/>
-      </p:ext>
-    </p:extLst>
-  </p:cSld>
-  <p:clrMapOvr>
-    <a:masterClrMapping/>
-  </p:clrMapOvr>
-  <p:timing>
-    <p:tnLst>
-      <p:par>
-        <p:cTn id="1" dur="indefinite" restart="never" nodeType="tmRoot"/>
-      </p:par>
-    </p:tnLst>
-  </p:timing>
 </p:sld>
 </file>
 
